--- a/1-Wahrscheinlichkeitsräume/1-Abbildungen/wtfi-1-wahrscheinlichkeitstheorie-beispiel.pptx
+++ b/1-Wahrscheinlichkeitsräume/1-Abbildungen/wtfi-1-wahrscheinlichkeitstheorie-beispiel.pptx
@@ -243,7 +243,7 @@
           <a:p>
             <a:fld id="{2B41A6A7-50F4-463B-910E-CFAB06BEAEBD}" type="datetimeFigureOut">
               <a:rPr lang="de-DE" smtClean="0"/>
-              <a:t>13.10.2026</a:t>
+              <a:t>22.10.2026</a:t>
             </a:fld>
             <a:endParaRPr lang="de-DE"/>
           </a:p>
@@ -413,7 +413,7 @@
           <a:p>
             <a:fld id="{2B41A6A7-50F4-463B-910E-CFAB06BEAEBD}" type="datetimeFigureOut">
               <a:rPr lang="de-DE" smtClean="0"/>
-              <a:t>13.10.2026</a:t>
+              <a:t>22.10.2026</a:t>
             </a:fld>
             <a:endParaRPr lang="de-DE"/>
           </a:p>
@@ -593,7 +593,7 @@
           <a:p>
             <a:fld id="{2B41A6A7-50F4-463B-910E-CFAB06BEAEBD}" type="datetimeFigureOut">
               <a:rPr lang="de-DE" smtClean="0"/>
-              <a:t>13.10.2026</a:t>
+              <a:t>22.10.2026</a:t>
             </a:fld>
             <a:endParaRPr lang="de-DE"/>
           </a:p>
@@ -763,7 +763,7 @@
           <a:p>
             <a:fld id="{2B41A6A7-50F4-463B-910E-CFAB06BEAEBD}" type="datetimeFigureOut">
               <a:rPr lang="de-DE" smtClean="0"/>
-              <a:t>13.10.2026</a:t>
+              <a:t>22.10.2026</a:t>
             </a:fld>
             <a:endParaRPr lang="de-DE"/>
           </a:p>
@@ -1007,7 +1007,7 @@
           <a:p>
             <a:fld id="{2B41A6A7-50F4-463B-910E-CFAB06BEAEBD}" type="datetimeFigureOut">
               <a:rPr lang="de-DE" smtClean="0"/>
-              <a:t>13.10.2026</a:t>
+              <a:t>22.10.2026</a:t>
             </a:fld>
             <a:endParaRPr lang="de-DE"/>
           </a:p>
@@ -1239,7 +1239,7 @@
           <a:p>
             <a:fld id="{2B41A6A7-50F4-463B-910E-CFAB06BEAEBD}" type="datetimeFigureOut">
               <a:rPr lang="de-DE" smtClean="0"/>
-              <a:t>13.10.2026</a:t>
+              <a:t>22.10.2026</a:t>
             </a:fld>
             <a:endParaRPr lang="de-DE"/>
           </a:p>
@@ -1606,7 +1606,7 @@
           <a:p>
             <a:fld id="{2B41A6A7-50F4-463B-910E-CFAB06BEAEBD}" type="datetimeFigureOut">
               <a:rPr lang="de-DE" smtClean="0"/>
-              <a:t>13.10.2026</a:t>
+              <a:t>22.10.2026</a:t>
             </a:fld>
             <a:endParaRPr lang="de-DE"/>
           </a:p>
@@ -1724,7 +1724,7 @@
           <a:p>
             <a:fld id="{2B41A6A7-50F4-463B-910E-CFAB06BEAEBD}" type="datetimeFigureOut">
               <a:rPr lang="de-DE" smtClean="0"/>
-              <a:t>13.10.2026</a:t>
+              <a:t>22.10.2026</a:t>
             </a:fld>
             <a:endParaRPr lang="de-DE"/>
           </a:p>
@@ -1819,7 +1819,7 @@
           <a:p>
             <a:fld id="{2B41A6A7-50F4-463B-910E-CFAB06BEAEBD}" type="datetimeFigureOut">
               <a:rPr lang="de-DE" smtClean="0"/>
-              <a:t>13.10.2026</a:t>
+              <a:t>22.10.2026</a:t>
             </a:fld>
             <a:endParaRPr lang="de-DE"/>
           </a:p>
@@ -2096,7 +2096,7 @@
           <a:p>
             <a:fld id="{2B41A6A7-50F4-463B-910E-CFAB06BEAEBD}" type="datetimeFigureOut">
               <a:rPr lang="de-DE" smtClean="0"/>
-              <a:t>13.10.2026</a:t>
+              <a:t>22.10.2026</a:t>
             </a:fld>
             <a:endParaRPr lang="de-DE"/>
           </a:p>
@@ -2353,7 +2353,7 @@
           <a:p>
             <a:fld id="{2B41A6A7-50F4-463B-910E-CFAB06BEAEBD}" type="datetimeFigureOut">
               <a:rPr lang="de-DE" smtClean="0"/>
-              <a:t>13.10.2026</a:t>
+              <a:t>22.10.2026</a:t>
             </a:fld>
             <a:endParaRPr lang="de-DE"/>
           </a:p>
@@ -2566,7 +2566,7 @@
           <a:p>
             <a:fld id="{2B41A6A7-50F4-463B-910E-CFAB06BEAEBD}" type="datetimeFigureOut">
               <a:rPr lang="de-DE" smtClean="0"/>
-              <a:t>13.10.2026</a:t>
+              <a:t>22.10.2026</a:t>
             </a:fld>
             <a:endParaRPr lang="de-DE"/>
           </a:p>
@@ -2984,7 +2984,7 @@
           <p:nvPr/>
         </p:nvGrpSpPr>
         <p:grpSpPr>
-          <a:xfrm>
+          <a:xfrm flipH="1">
             <a:off x="2359140" y="935139"/>
             <a:ext cx="4472082" cy="4472081"/>
             <a:chOff x="2608226" y="1345579"/>
@@ -3238,8 +3238,8 @@
         </p:nvSpPr>
         <p:spPr>
           <a:xfrm>
-            <a:off x="5843843" y="1574155"/>
-            <a:ext cx="2101857" cy="553998"/>
+            <a:off x="1707525" y="1578605"/>
+            <a:ext cx="1370312" cy="553998"/>
           </a:xfrm>
           <a:prstGeom prst="rect">
             <a:avLst/>
@@ -3252,13 +3252,14 @@
           </a:bodyPr>
           <a:lstStyle/>
           <a:p>
+            <a:pPr algn="ctr"/>
             <a:r>
               <a:rPr lang="de-DE" sz="3000" dirty="0">
                 <a:latin typeface="CMU Sans Serif" panose="02000603000000000000" pitchFamily="50" charset="0"/>
                 <a:ea typeface="CMU Sans Serif" panose="02000603000000000000" pitchFamily="50" charset="0"/>
                 <a:cs typeface="CMU Sans Serif" panose="02000603000000000000" pitchFamily="50" charset="0"/>
               </a:rPr>
-              <a:t>Wirklichkeit</a:t>
+              <a:t>Realität</a:t>
             </a:r>
           </a:p>
         </p:txBody>
@@ -3277,7 +3278,7 @@
         </p:nvSpPr>
         <p:spPr>
           <a:xfrm>
-            <a:off x="513824" y="1788935"/>
+            <a:off x="5006132" y="1788935"/>
             <a:ext cx="3624044" cy="3195311"/>
           </a:xfrm>
           <a:prstGeom prst="cloud">
@@ -3345,7 +3346,7 @@
         </p:nvSpPr>
         <p:spPr>
           <a:xfrm>
-            <a:off x="990646" y="2317948"/>
+            <a:off x="5440874" y="2317948"/>
             <a:ext cx="2722220" cy="369332"/>
           </a:xfrm>
           <a:prstGeom prst="rect">
@@ -3359,6 +3360,7 @@
           </a:bodyPr>
           <a:lstStyle/>
           <a:p>
+            <a:pPr algn="ctr"/>
             <a:r>
               <a:rPr lang="de-DE" dirty="0">
                 <a:latin typeface="CMU Sans Serif" panose="02000603000000000000" pitchFamily="50" charset="0"/>
@@ -3474,8 +3476,8 @@
         </p:nvSpPr>
         <p:spPr>
           <a:xfrm>
-            <a:off x="1609405" y="1577214"/>
-            <a:ext cx="1266693" cy="553998"/>
+            <a:off x="6159020" y="1577214"/>
+            <a:ext cx="1285929" cy="553998"/>
           </a:xfrm>
           <a:prstGeom prst="rect">
             <a:avLst/>
@@ -3488,6 +3490,7 @@
           </a:bodyPr>
           <a:lstStyle/>
           <a:p>
+            <a:pPr algn="ctr"/>
             <a:r>
               <a:rPr lang="de-DE" sz="3000" dirty="0">
                 <a:latin typeface="CMU Sans Serif" panose="02000603000000000000" pitchFamily="50" charset="0"/>
@@ -3515,7 +3518,7 @@
             </p:nvSpPr>
             <p:spPr>
               <a:xfrm>
-                <a:off x="1270785" y="2805347"/>
+                <a:off x="5728710" y="2805347"/>
                 <a:ext cx="2146549" cy="400110"/>
               </a:xfrm>
               <a:prstGeom prst="rect">
@@ -3529,7 +3532,7 @@
               </a:bodyPr>
               <a:lstStyle/>
               <a:p>
-                <a:pPr/>
+                <a:pPr algn="ctr"/>
                 <a14:m>
                   <m:oMathPara xmlns:m="http://schemas.openxmlformats.org/officeDocument/2006/math">
                     <m:oMath>
@@ -3592,7 +3595,7 @@
             </p:nvSpPr>
             <p:spPr>
               <a:xfrm>
-                <a:off x="1270785" y="2805347"/>
+                <a:off x="5728710" y="2805347"/>
                 <a:ext cx="2146549" cy="400110"/>
               </a:xfrm>
               <a:prstGeom prst="rect">
@@ -3636,7 +3639,7 @@
             </p:nvSpPr>
             <p:spPr>
               <a:xfrm>
-                <a:off x="1614068" y="3323279"/>
+                <a:off x="6065885" y="3323279"/>
                 <a:ext cx="1472198" cy="400110"/>
               </a:xfrm>
               <a:prstGeom prst="rect">
@@ -3650,7 +3653,7 @@
               </a:bodyPr>
               <a:lstStyle/>
               <a:p>
-                <a:pPr/>
+                <a:pPr algn="ctr"/>
                 <a14:m>
                   <m:oMathPara xmlns:m="http://schemas.openxmlformats.org/officeDocument/2006/math">
                     <m:oMath>
@@ -3757,7 +3760,7 @@
             </p:nvSpPr>
             <p:spPr>
               <a:xfrm>
-                <a:off x="1614068" y="3323279"/>
+                <a:off x="6065885" y="3323279"/>
                 <a:ext cx="1472198" cy="400110"/>
               </a:xfrm>
               <a:prstGeom prst="rect">
@@ -3801,8 +3804,8 @@
             </p:nvSpPr>
             <p:spPr>
               <a:xfrm>
-                <a:off x="1412795" y="3837269"/>
-                <a:ext cx="1899944" cy="707886"/>
+                <a:off x="5893626" y="3837269"/>
+                <a:ext cx="1816716" cy="400110"/>
               </a:xfrm>
               <a:prstGeom prst="rect">
                 <a:avLst/>
@@ -3815,7 +3818,7 @@
               </a:bodyPr>
               <a:lstStyle/>
               <a:p>
-                <a:pPr/>
+                <a:pPr algn="ctr"/>
                 <a14:m>
                   <m:oMathPara xmlns:m="http://schemas.openxmlformats.org/officeDocument/2006/math">
                     <m:oMath>
@@ -3889,18 +3892,6 @@
                     </m:oMath>
                   </m:oMathPara>
                 </a14:m>
-                <a:endParaRPr lang="de-DE" sz="2000" b="0" dirty="0">
-                  <a:solidFill>
-                    <a:schemeClr val="bg1">
-                      <a:lumMod val="50000"/>
-                    </a:schemeClr>
-                  </a:solidFill>
-                  <a:latin typeface="CMU Sans Serif" panose="02000603000000000000" pitchFamily="50" charset="0"/>
-                  <a:ea typeface="CMU Sans Serif" panose="02000603000000000000" pitchFamily="50" charset="0"/>
-                  <a:cs typeface="CMU Sans Serif" panose="02000603000000000000" pitchFamily="50" charset="0"/>
-                </a:endParaRPr>
-              </a:p>
-              <a:p>
                 <a:endParaRPr lang="de-DE" sz="2000" dirty="0">
                   <a:solidFill>
                     <a:schemeClr val="bg1">
@@ -3932,8 +3923,8 @@
             </p:nvSpPr>
             <p:spPr>
               <a:xfrm>
-                <a:off x="1412795" y="3837269"/>
-                <a:ext cx="1899944" cy="707886"/>
+                <a:off x="5893626" y="3837269"/>
+                <a:ext cx="1816716" cy="400110"/>
               </a:xfrm>
               <a:prstGeom prst="rect">
                 <a:avLst/>
@@ -3941,7 +3932,7 @@
               <a:blipFill>
                 <a:blip r:embed="rId5"/>
                 <a:stretch>
-                  <a:fillRect/>
+                  <a:fillRect b="-13636"/>
                 </a:stretch>
               </a:blipFill>
             </p:spPr>
@@ -4013,7 +4004,7 @@
         </p:nvSpPr>
         <p:spPr>
           <a:xfrm>
-            <a:off x="6045785" y="2317299"/>
+            <a:off x="1601439" y="2317299"/>
             <a:ext cx="1582484" cy="374461"/>
           </a:xfrm>
           <a:prstGeom prst="rect">
@@ -4079,7 +4070,7 @@
         </p:blipFill>
         <p:spPr>
           <a:xfrm>
-            <a:off x="6136586" y="2805347"/>
+            <a:off x="1601106" y="2805347"/>
             <a:ext cx="1516374" cy="1548298"/>
           </a:xfrm>
           <a:prstGeom prst="rect">
@@ -4101,7 +4092,7 @@
         </p:nvSpPr>
         <p:spPr>
           <a:xfrm>
-            <a:off x="5649164" y="2628088"/>
+            <a:off x="1037008" y="2619320"/>
             <a:ext cx="2491217" cy="2050999"/>
           </a:xfrm>
           <a:prstGeom prst="rect">
@@ -4161,7 +4152,7 @@
         </p:nvSpPr>
         <p:spPr>
           <a:xfrm>
-            <a:off x="5367027" y="3268956"/>
+            <a:off x="822380" y="3266291"/>
             <a:ext cx="3140603" cy="400110"/>
           </a:xfrm>
           <a:prstGeom prst="rect">
@@ -4231,8 +4222,8 @@
           </a:p>
         </p:txBody>
       </p:sp>
-      <mc:AlternateContent xmlns:mc="http://schemas.openxmlformats.org/markup-compatibility/2006">
-        <mc:Choice xmlns:a14="http://schemas.microsoft.com/office/drawing/2010/main" Requires="a14">
+      <mc:AlternateContent xmlns:mc="http://schemas.openxmlformats.org/markup-compatibility/2006" xmlns:a14="http://schemas.microsoft.com/office/drawing/2010/main">
+        <mc:Choice Requires="a14">
           <p:sp>
             <p:nvSpPr>
               <p:cNvPr id="25" name="TextBox 24">
@@ -4348,7 +4339,7 @@
             </p:txBody>
           </p:sp>
         </mc:Choice>
-        <mc:Fallback>
+        <mc:Fallback xmlns="">
           <p:sp>
             <p:nvSpPr>
               <p:cNvPr id="25" name="TextBox 24">
